--- a/deck.pptx
+++ b/deck.pptx
@@ -3180,8 +3180,8 @@
         </p:nvSpPr>
         <p:spPr>
           <a:xfrm>
-            <a:off x="857228" y="1699128"/>
-            <a:ext cx="3238418" cy="4000399"/>
+            <a:off x="258529" y="1526483"/>
+            <a:ext cx="3608524" cy="4457589"/>
           </a:xfrm>
           <a:prstGeom prst="rect">
             <a:avLst/>
@@ -3228,8 +3228,8 @@
         </p:nvSpPr>
         <p:spPr>
           <a:xfrm>
-            <a:off x="4476638" y="1699128"/>
-            <a:ext cx="3238418" cy="4000399"/>
+            <a:off x="4291585" y="1526483"/>
+            <a:ext cx="3608524" cy="4457589"/>
           </a:xfrm>
           <a:prstGeom prst="rect">
             <a:avLst/>
@@ -3276,8 +3276,8 @@
         </p:nvSpPr>
         <p:spPr>
           <a:xfrm>
-            <a:off x="8096047" y="1699128"/>
-            <a:ext cx="3238418" cy="4000399"/>
+            <a:off x="8324641" y="1526483"/>
+            <a:ext cx="3608524" cy="4457589"/>
           </a:xfrm>
           <a:prstGeom prst="rect">
             <a:avLst/>
@@ -3954,8 +3954,8 @@
         </p:nvSpPr>
         <p:spPr>
           <a:xfrm>
-            <a:off x="761980" y="1884861"/>
-            <a:ext cx="1996330" cy="3628934"/>
+            <a:off x="152396" y="1733442"/>
+            <a:ext cx="2224482" cy="4043669"/>
           </a:xfrm>
           <a:prstGeom prst="rect">
             <a:avLst/>
@@ -4002,8 +4002,8 @@
         </p:nvSpPr>
         <p:spPr>
           <a:xfrm>
-            <a:off x="2929757" y="1884861"/>
-            <a:ext cx="1996479" cy="3628934"/>
+            <a:off x="2567918" y="1733442"/>
+            <a:ext cx="2224648" cy="4043669"/>
           </a:xfrm>
           <a:prstGeom prst="rect">
             <a:avLst/>
@@ -4050,8 +4050,8 @@
         </p:nvSpPr>
         <p:spPr>
           <a:xfrm>
-            <a:off x="5097682" y="1884861"/>
-            <a:ext cx="1996330" cy="3628934"/>
+            <a:off x="4983606" y="1733442"/>
+            <a:ext cx="2224482" cy="4043669"/>
           </a:xfrm>
           <a:prstGeom prst="rect">
             <a:avLst/>
@@ -4098,8 +4098,8 @@
         </p:nvSpPr>
         <p:spPr>
           <a:xfrm>
-            <a:off x="7265458" y="1884861"/>
-            <a:ext cx="1996479" cy="3628934"/>
+            <a:off x="7399128" y="1733442"/>
+            <a:ext cx="2224648" cy="4043669"/>
           </a:xfrm>
           <a:prstGeom prst="rect">
             <a:avLst/>
@@ -4146,8 +4146,8 @@
         </p:nvSpPr>
         <p:spPr>
           <a:xfrm>
-            <a:off x="9433383" y="1884861"/>
-            <a:ext cx="1996330" cy="3628934"/>
+            <a:off x="9814815" y="1733442"/>
+            <a:ext cx="2224482" cy="4043669"/>
           </a:xfrm>
           <a:prstGeom prst="rect">
             <a:avLst/>
